--- a/01_Python_Essentials/L01-Intro-installation/01-2_Python-Install-python.pptx
+++ b/01_Python_Essentials/L01-Intro-installation/01-2_Python-Install-python.pptx
@@ -219,7 +219,7 @@
           <a:p>
             <a:fld id="{7BAEECA8-D063-486F-AE31-5020270C1449}" type="datetimeFigureOut">
               <a:rPr lang="en-US" smtClean="0"/>
-              <a:t>1/8/2026</a:t>
+              <a:t>6/13/2026</a:t>
             </a:fld>
             <a:endParaRPr lang="en-US"/>
           </a:p>
@@ -312,6 +312,286 @@
   </p:cSld>
   <p:clrMap bg1="lt1" tx1="dk1" bg2="lt2" tx2="dk2" accent1="accent1" accent2="accent2" accent3="accent3" accent4="accent4" accent5="accent5" accent6="accent6" hlink="hlink" folHlink="folHlink"/>
 </p:handoutMaster>
+</file>
+
+<file path=ppt/ink/ink1.xml><?xml version="1.0" encoding="utf-8"?>
+<inkml:ink xmlns:inkml="http://www.w3.org/2003/InkML">
+  <inkml:definitions>
+    <inkml:context xml:id="ctx0">
+      <inkml:inkSource xml:id="inkSrc0">
+        <inkml:traceFormat>
+          <inkml:channel name="X" type="integer" min="-2.14748E9" max="2.14748E9" units="cm"/>
+          <inkml:channel name="Y" type="integer" min="-2.14748E9" max="2.14748E9" units="cm"/>
+          <inkml:channel name="F" type="integer" max="32767" units="dev"/>
+        </inkml:traceFormat>
+        <inkml:channelProperties>
+          <inkml:channelProperty channel="X" name="resolution" value="1000" units="1/cm"/>
+          <inkml:channelProperty channel="Y" name="resolution" value="1000" units="1/cm"/>
+          <inkml:channelProperty channel="F" name="resolution" value="0" units="1/dev"/>
+        </inkml:channelProperties>
+      </inkml:inkSource>
+      <inkml:timestamp xml:id="ts0" timeString="2026-05-02T12:43:19.223"/>
+    </inkml:context>
+    <inkml:brush xml:id="br0">
+      <inkml:brushProperty name="width" value="0.1" units="cm"/>
+      <inkml:brushProperty name="height" value="0.1" units="cm"/>
+      <inkml:brushProperty name="color" value="#F6630D"/>
+    </inkml:brush>
+  </inkml:definitions>
+  <inkml:trace contextRef="#ctx0" brushRef="#br0">1772 29 24575,'0'-1'0,"1"0"0,-1 0 0,1 0 0,-1 0 0,1 0 0,-1 0 0,1 0 0,0 0 0,0 0 0,0 0 0,0 0 0,-1 0 0,1 0 0,0 0 0,0 1 0,1-1 0,-1 0 0,0 1 0,0-1 0,0 1 0,0-1 0,0 1 0,1 0 0,-1 0 0,0-1 0,0 1 0,3 0 0,39-5 0,-38 5 0,66-4 0,100 8 0,-168-3 0,0-1 0,-1 1 0,1 0 0,0-1 0,0 1 0,-1 1 0,1-1 0,-1 0 0,1 1 0,-1-1 0,0 1 0,1 0 0,-1 0 0,0 0 0,0 0 0,0 0 0,0 0 0,-1 0 0,1 1 0,-1-1 0,1 1 0,-1-1 0,0 1 0,0-1 0,0 1 0,0 0 0,0 0 0,-1 0 0,1-1 0,-1 7 0,2 10 0,-1 1 0,-1-1 0,-4 32 0,1-14 0,3 7 0,-2 1 0,-2 0 0,-2-1 0,-1 0 0,-19 57 0,24-96 0,-1 1 0,0 0 0,0-1 0,0 0 0,-1 0 0,0 0 0,0 0 0,0-1 0,-1 1 0,1-1 0,-1 0 0,0 0 0,0-1 0,0 1 0,-1-1 0,-9 4 0,3-2 0,0-1 0,0 0 0,0-1 0,-1-1 0,1 0 0,-1 0 0,-15-1 0,-16-1 0,-1-3 0,-74-13 0,75 10 0,32 5 0,1-1 0,0 0 0,0 0 0,0-1 0,0 0 0,0-1 0,-11-5 0,2 0 0,-1 1 0,0 1 0,0 1 0,0 1 0,-40-4 0,30 4 0,-47-4 0,0 4 0,-112 8 0,50-1 0,-655-2 0,790 0-103,2 1 37,-1-1-1,1 0 1,0 0-1,0 0 1,0 0 0,0 0-1,0-1 1,0 1-1,0-1 1,0 0-1,0 0 1,0 0 0,1 0-1,-1-1 1,0 1-1,1-1 1,-1 0-1,-3-2 1,-5-15-6760</inkml:trace>
+</inkml:ink>
+</file>
+
+<file path=ppt/ink/ink10.xml><?xml version="1.0" encoding="utf-8"?>
+<inkml:ink xmlns:inkml="http://www.w3.org/2003/InkML">
+  <inkml:definitions>
+    <inkml:context xml:id="ctx0">
+      <inkml:inkSource xml:id="inkSrc0">
+        <inkml:traceFormat>
+          <inkml:channel name="X" type="integer" min="-2.14748E9" max="2.14748E9" units="cm"/>
+          <inkml:channel name="Y" type="integer" min="-2.14748E9" max="2.14748E9" units="cm"/>
+          <inkml:channel name="F" type="integer" max="32767" units="dev"/>
+        </inkml:traceFormat>
+        <inkml:channelProperties>
+          <inkml:channelProperty channel="X" name="resolution" value="1000" units="1/cm"/>
+          <inkml:channelProperty channel="Y" name="resolution" value="1000" units="1/cm"/>
+          <inkml:channelProperty channel="F" name="resolution" value="0" units="1/dev"/>
+        </inkml:channelProperties>
+      </inkml:inkSource>
+      <inkml:timestamp xml:id="ts0" timeString="2026-06-13T06:40:06.029"/>
+    </inkml:context>
+    <inkml:brush xml:id="br0">
+      <inkml:brushProperty name="width" value="0.1" units="cm"/>
+      <inkml:brushProperty name="height" value="0.1" units="cm"/>
+      <inkml:brushProperty name="color" value="#FFC114"/>
+    </inkml:brush>
+  </inkml:definitions>
+  <inkml:trace contextRef="#ctx0" brushRef="#br0">1 482 24575,'2'1'0,"1"-1"0,-1 1 0,1-1 0,-1 1 0,1 0 0,-1 0 0,1 0 0,-1 0 0,0 0 0,1 1 0,-1-1 0,0 1 0,0-1 0,0 1 0,0 0 0,0 0 0,-1 0 0,1 0 0,-1 0 0,1 0 0,-1 0 0,2 4 0,26 64 0,-16-36 0,56 119 0,-69-151 0,1 0 0,0 1 0,0-1 0,1 0 0,-1 0 0,0 0 0,1 0 0,-1 0 0,1-1 0,-1 1 0,1 0 0,0-1 0,0 1 0,0-1 0,0 1 0,0-1 0,0 0 0,0 0 0,0 0 0,0 0 0,1 0 0,-1-1 0,0 1 0,1-1 0,-1 1 0,0-1 0,1 0 0,-1 0 0,3 0 0,4-3 0,0 1 0,0-2 0,0 0 0,-1 0 0,0 0 0,14-10 0,193-125 0,122-73 0,18 26 0,-297 161 0,335-139 0,-311 128-1365,-56 20-5461</inkml:trace>
+</inkml:ink>
+</file>
+
+<file path=ppt/ink/ink2.xml><?xml version="1.0" encoding="utf-8"?>
+<inkml:ink xmlns:inkml="http://www.w3.org/2003/InkML">
+  <inkml:definitions>
+    <inkml:context xml:id="ctx0">
+      <inkml:inkSource xml:id="inkSrc0">
+        <inkml:traceFormat>
+          <inkml:channel name="X" type="integer" min="-2.14748E9" max="2.14748E9" units="cm"/>
+          <inkml:channel name="Y" type="integer" min="-2.14748E9" max="2.14748E9" units="cm"/>
+          <inkml:channel name="F" type="integer" max="32767" units="dev"/>
+        </inkml:traceFormat>
+        <inkml:channelProperties>
+          <inkml:channelProperty channel="X" name="resolution" value="1000" units="1/cm"/>
+          <inkml:channelProperty channel="Y" name="resolution" value="1000" units="1/cm"/>
+          <inkml:channelProperty channel="F" name="resolution" value="0" units="1/dev"/>
+        </inkml:channelProperties>
+      </inkml:inkSource>
+      <inkml:timestamp xml:id="ts0" timeString="2026-05-02T12:43:27.262"/>
+    </inkml:context>
+    <inkml:brush xml:id="br0">
+      <inkml:brushProperty name="width" value="0.1" units="cm"/>
+      <inkml:brushProperty name="height" value="0.1" units="cm"/>
+      <inkml:brushProperty name="color" value="#F6630D"/>
+    </inkml:brush>
+  </inkml:definitions>
+  <inkml:trace contextRef="#ctx0" brushRef="#br0">2013 0 24575,'-1'2'0,"0"-1"0,1 0 0,-1 0 0,0 0 0,0 0 0,0 0 0,0 0 0,0 0 0,0 0 0,0 0 0,0-1 0,0 1 0,0 0 0,0-1 0,0 1 0,-1 0 0,1-1 0,0 0 0,0 1 0,-1-1 0,1 0 0,0 0 0,-3 1 0,-38 5 0,39-6 0,-348 5 0,191-8 0,-1031 3 0,1180 1 0,1-1 0,0 1 0,-1 1 0,1 0 0,0 0 0,0 1 0,0 1 0,0-1 0,1 1 0,0 1 0,-16 10 0,19-11 0,0 1 0,0-1 0,0 2 0,1-1 0,0 1 0,0-1 0,1 1 0,-1 1 0,1-1 0,0 1 0,1-1 0,0 1 0,0 0 0,0 0 0,1 0 0,0 1 0,-1 7 0,-10 77-682,-1 138-1,14-197-6143</inkml:trace>
+</inkml:ink>
+</file>
+
+<file path=ppt/ink/ink3.xml><?xml version="1.0" encoding="utf-8"?>
+<inkml:ink xmlns:inkml="http://www.w3.org/2003/InkML">
+  <inkml:definitions>
+    <inkml:context xml:id="ctx0">
+      <inkml:inkSource xml:id="inkSrc0">
+        <inkml:traceFormat>
+          <inkml:channel name="X" type="integer" min="-2.14748E9" max="2.14748E9" units="cm"/>
+          <inkml:channel name="Y" type="integer" min="-2.14748E9" max="2.14748E9" units="cm"/>
+          <inkml:channel name="F" type="integer" max="32767" units="dev"/>
+        </inkml:traceFormat>
+        <inkml:channelProperties>
+          <inkml:channelProperty channel="X" name="resolution" value="1000" units="1/cm"/>
+          <inkml:channelProperty channel="Y" name="resolution" value="1000" units="1/cm"/>
+          <inkml:channelProperty channel="F" name="resolution" value="0" units="1/dev"/>
+        </inkml:channelProperties>
+      </inkml:inkSource>
+      <inkml:timestamp xml:id="ts0" timeString="2026-06-13T06:38:26.715"/>
+    </inkml:context>
+    <inkml:brush xml:id="br0">
+      <inkml:brushProperty name="width" value="0.1" units="cm"/>
+      <inkml:brushProperty name="height" value="0.1" units="cm"/>
+      <inkml:brushProperty name="color" value="#5B2D90"/>
+    </inkml:brush>
+  </inkml:definitions>
+  <inkml:trace contextRef="#ctx0" brushRef="#br0">1 708 24575,'0'0'0,"0"-1"0,0 1 0,0-1 0,0 0 0,1 1 0,-1-1 0,0 0 0,1 1 0,-1-1 0,0 1 0,1-1 0,-1 1 0,0-1 0,1 1 0,-1-1 0,1 1 0,-1-1 0,1 1 0,-1 0 0,1-1 0,0 1 0,-1 0 0,1-1 0,-1 1 0,1 0 0,0 0 0,-1 0 0,1 0 0,-1-1 0,1 1 0,0 0 0,-1 0 0,1 0 0,0 0 0,-1 0 0,1 1 0,0-1 0,-1 0 0,1 0 0,-1 0 0,1 0 0,0 1 0,-1-1 0,1 0 0,-1 1 0,1-1 0,-1 0 0,2 1 0,29 16 0,-20-6 0,-1 1 0,-1 0 0,1 0 0,-2 1 0,0 0 0,-1 1 0,0-1 0,-1 1 0,0 1 0,-1-1 0,3 17 0,18 42 0,-18-50 0,15 37 0,-23-59 0,1 1 0,0 0 0,0-1 0,0 1 0,0 0 0,0-1 0,0 1 0,0-1 0,0 1 0,1-1 0,-1 0 0,1 0 0,-1 0 0,1 1 0,-1-1 0,1 0 0,0-1 0,-1 1 0,1 0 0,0 0 0,0-1 0,0 1 0,-1-1 0,1 0 0,3 1 0,4-3 0,1-1 0,0 0 0,-1 0 0,1-1 0,-1 0 0,0 0 0,0-1 0,-1 0 0,12-10 0,76-66 0,-73 60 0,312-269 0,-309 265 0,-2 0 0,0-1 0,-2-2 0,-1 0 0,33-59 0,-17 31 0,3 3 0,76-80 0,-57 67 0,16-11-1365,-42 46-5461</inkml:trace>
+</inkml:ink>
+</file>
+
+<file path=ppt/ink/ink4.xml><?xml version="1.0" encoding="utf-8"?>
+<inkml:ink xmlns:inkml="http://www.w3.org/2003/InkML">
+  <inkml:definitions>
+    <inkml:context xml:id="ctx0">
+      <inkml:inkSource xml:id="inkSrc0">
+        <inkml:traceFormat>
+          <inkml:channel name="X" type="integer" min="-2.14748E9" max="2.14748E9" units="cm"/>
+          <inkml:channel name="Y" type="integer" min="-2.14748E9" max="2.14748E9" units="cm"/>
+          <inkml:channel name="F" type="integer" max="32767" units="dev"/>
+        </inkml:traceFormat>
+        <inkml:channelProperties>
+          <inkml:channelProperty channel="X" name="resolution" value="1000" units="1/cm"/>
+          <inkml:channelProperty channel="Y" name="resolution" value="1000" units="1/cm"/>
+          <inkml:channelProperty channel="F" name="resolution" value="0" units="1/dev"/>
+        </inkml:channelProperties>
+      </inkml:inkSource>
+      <inkml:timestamp xml:id="ts0" timeString="2026-06-13T06:38:29.952"/>
+    </inkml:context>
+    <inkml:brush xml:id="br0">
+      <inkml:brushProperty name="width" value="0.1" units="cm"/>
+      <inkml:brushProperty name="height" value="0.1" units="cm"/>
+      <inkml:brushProperty name="color" value="#5B2D90"/>
+    </inkml:brush>
+  </inkml:definitions>
+  <inkml:trace contextRef="#ctx0" brushRef="#br0">1758 107 24575,'-858'0'0,"818"-2"0,0-3 0,1-1 0,-55-16 0,-32-5 0,-222-12 0,334 37 0,1 0 0,0 1 0,-1 1 0,1 0 0,-1 0 0,1 2 0,-15 2 0,24-3 0,0 1 0,0-1 0,-1 1 0,1 0 0,0 0 0,0 1 0,1-1 0,-1 1 0,0 0 0,1 0 0,0 0 0,-1 0 0,1 1 0,1-1 0,-1 1 0,0 0 0,1-1 0,0 1 0,0 1 0,0-1 0,0 0 0,1 0 0,0 1 0,-1 4 0,-5 30 0,2 0 0,2 0 0,2 0 0,6 67 0,-1-15 0,-1 887 0,-4-542 0,3-388 0,3 0 0,17 76 0,4 26 0,-19-105 0,3-1 0,2 1 0,18 47 0,7 22 0,5-3 0,-6-18 0,-14-30 0,-9-30 0,14 66 0,-26-93 0,-1 1 0,2-1 0,-1 0 0,1 0 0,0-1 0,0 1 0,1 0 0,0-1 0,0 1 0,0-1 0,0 0 0,7 7 0,-5-8 0,-1-1 0,0 0 0,1-1 0,0 1 0,0-1 0,0 0 0,0 0 0,0 0 0,0-1 0,0 1 0,1-1 0,-1-1 0,0 1 0,11-1 0,305 25 133,-57-4-1631,-213-18-5328</inkml:trace>
+</inkml:ink>
+</file>
+
+<file path=ppt/ink/ink5.xml><?xml version="1.0" encoding="utf-8"?>
+<inkml:ink xmlns:inkml="http://www.w3.org/2003/InkML">
+  <inkml:definitions>
+    <inkml:context xml:id="ctx0">
+      <inkml:inkSource xml:id="inkSrc0">
+        <inkml:traceFormat>
+          <inkml:channel name="X" type="integer" min="-2.14748E9" max="2.14748E9" units="cm"/>
+          <inkml:channel name="Y" type="integer" min="-2.14748E9" max="2.14748E9" units="cm"/>
+          <inkml:channel name="F" type="integer" max="32767" units="dev"/>
+        </inkml:traceFormat>
+        <inkml:channelProperties>
+          <inkml:channelProperty channel="X" name="resolution" value="1000" units="1/cm"/>
+          <inkml:channelProperty channel="Y" name="resolution" value="1000" units="1/cm"/>
+          <inkml:channelProperty channel="F" name="resolution" value="0" units="1/dev"/>
+        </inkml:channelProperties>
+      </inkml:inkSource>
+      <inkml:timestamp xml:id="ts0" timeString="2026-06-13T06:38:32.460"/>
+    </inkml:context>
+    <inkml:brush xml:id="br0">
+      <inkml:brushProperty name="width" value="0.1" units="cm"/>
+      <inkml:brushProperty name="height" value="0.1" units="cm"/>
+      <inkml:brushProperty name="color" value="#5B2D90"/>
+    </inkml:brush>
+  </inkml:definitions>
+  <inkml:trace contextRef="#ctx0" brushRef="#br0">1 41 24575,'53'134'0,"-39"-96"0,-11-29 0,0 0 0,0 0 0,1-1 0,0 1 0,0-1 0,1 0 0,0 0 0,1 0 0,9 10 0,-13-17 0,0 0 0,1 0 0,-1 0 0,0 0 0,0-1 0,1 1 0,-1-1 0,0 1 0,1-1 0,-1 0 0,0 0 0,1 0 0,-1 0 0,1 0 0,-1-1 0,0 1 0,1-1 0,-1 0 0,0 1 0,0-1 0,0 0 0,4-2 0,46-31 0,-48 31 0,115-95 29,-74 57-494,3 3 1,64-40-1,-88 64-6361</inkml:trace>
+</inkml:ink>
+</file>
+
+<file path=ppt/ink/ink6.xml><?xml version="1.0" encoding="utf-8"?>
+<inkml:ink xmlns:inkml="http://www.w3.org/2003/InkML">
+  <inkml:definitions>
+    <inkml:context xml:id="ctx0">
+      <inkml:inkSource xml:id="inkSrc0">
+        <inkml:traceFormat>
+          <inkml:channel name="X" type="integer" min="-2.14748E9" max="2.14748E9" units="cm"/>
+          <inkml:channel name="Y" type="integer" min="-2.14748E9" max="2.14748E9" units="cm"/>
+          <inkml:channel name="F" type="integer" max="32767" units="dev"/>
+        </inkml:traceFormat>
+        <inkml:channelProperties>
+          <inkml:channelProperty channel="X" name="resolution" value="1000" units="1/cm"/>
+          <inkml:channelProperty channel="Y" name="resolution" value="1000" units="1/cm"/>
+          <inkml:channelProperty channel="F" name="resolution" value="0" units="1/dev"/>
+        </inkml:channelProperties>
+      </inkml:inkSource>
+      <inkml:timestamp xml:id="ts0" timeString="2026-06-13T06:38:34.259"/>
+    </inkml:context>
+    <inkml:brush xml:id="br0">
+      <inkml:brushProperty name="width" value="0.1" units="cm"/>
+      <inkml:brushProperty name="height" value="0.1" units="cm"/>
+      <inkml:brushProperty name="color" value="#5B2D90"/>
+    </inkml:brush>
+  </inkml:definitions>
+  <inkml:trace contextRef="#ctx0" brushRef="#br0">1 211 24575,'3'1'0,"0"0"0,0 0 0,0 0 0,0 0 0,0 1 0,0-1 0,0 1 0,0-1 0,-1 1 0,1 0 0,-1 0 0,1 0 0,3 5 0,27 34 0,-2 23 0,-26-50 0,0-1 0,1 0 0,1 0 0,15 21 0,-21-32 0,1 0 0,0-1 0,0 1 0,0-1 0,0 1 0,0-1 0,0 0 0,0 0 0,0 0 0,0 0 0,1 0 0,-1 0 0,0 0 0,1-1 0,-1 1 0,1-1 0,-1 0 0,5 0 0,46-8 0,-18-2 0,-2-1 0,1-2 0,-2-1 0,46-28 0,117-84 0,-188 121 0,221-176-1365,-187 143-5461</inkml:trace>
+</inkml:ink>
+</file>
+
+<file path=ppt/ink/ink7.xml><?xml version="1.0" encoding="utf-8"?>
+<inkml:ink xmlns:inkml="http://www.w3.org/2003/InkML">
+  <inkml:definitions>
+    <inkml:context xml:id="ctx0">
+      <inkml:inkSource xml:id="inkSrc0">
+        <inkml:traceFormat>
+          <inkml:channel name="X" type="integer" min="-2.14748E9" max="2.14748E9" units="cm"/>
+          <inkml:channel name="Y" type="integer" min="-2.14748E9" max="2.14748E9" units="cm"/>
+          <inkml:channel name="F" type="integer" max="32767" units="dev"/>
+        </inkml:traceFormat>
+        <inkml:channelProperties>
+          <inkml:channelProperty channel="X" name="resolution" value="1000" units="1/cm"/>
+          <inkml:channelProperty channel="Y" name="resolution" value="1000" units="1/cm"/>
+          <inkml:channelProperty channel="F" name="resolution" value="0" units="1/dev"/>
+        </inkml:channelProperties>
+      </inkml:inkSource>
+      <inkml:timestamp xml:id="ts0" timeString="2026-06-13T06:39:22.809"/>
+    </inkml:context>
+    <inkml:brush xml:id="br0">
+      <inkml:brushProperty name="width" value="0.1" units="cm"/>
+      <inkml:brushProperty name="height" value="0.1" units="cm"/>
+      <inkml:brushProperty name="color" value="#FFC114"/>
+    </inkml:brush>
+  </inkml:definitions>
+  <inkml:trace contextRef="#ctx0" brushRef="#br0">852 2 24575,'-147'-2'0,"-159"5"0,292-1 0,1 1 0,0 0 0,0 1 0,-22 10 0,-16 5 0,41-16 0,0 2 0,0-1 0,1 1 0,0 1 0,0-1 0,0 2 0,1-1 0,0 1 0,0 0 0,0 1 0,1 0 0,0 0 0,1 1 0,0-1 0,0 1 0,1 1 0,0-1 0,-6 17 0,0 4 0,1 1 0,2 0 0,1 1 0,1-1 0,-1 34 0,2 15 0,5-50 0,-2 0 0,-1-1 0,-2 0 0,-9 38 0,5-37 0,2 1 0,1-1 0,-2 62 0,9 97 0,2-70 0,-3 2764 0,0-2876 0,0 0 0,0-1 0,1 1 0,0 0 0,1 0 0,-1-1 0,1 1 0,0-1 0,1 0 0,0 1 0,0-1 0,0-1 0,7 11 0,-3-9 0,-1 0 0,1-1 0,0 1 0,1-1 0,0-1 0,0 1 0,0-2 0,1 1 0,11 4 0,6 1 7,0-1 0,1-1 1,0-2-1,0-1 0,52 4 0,145-10-227,-106-2-968,-84 3-5638</inkml:trace>
+</inkml:ink>
+</file>
+
+<file path=ppt/ink/ink8.xml><?xml version="1.0" encoding="utf-8"?>
+<inkml:ink xmlns:inkml="http://www.w3.org/2003/InkML">
+  <inkml:definitions>
+    <inkml:context xml:id="ctx0">
+      <inkml:inkSource xml:id="inkSrc0">
+        <inkml:traceFormat>
+          <inkml:channel name="X" type="integer" min="-2.14748E9" max="2.14748E9" units="cm"/>
+          <inkml:channel name="Y" type="integer" min="-2.14748E9" max="2.14748E9" units="cm"/>
+          <inkml:channel name="F" type="integer" max="32767" units="dev"/>
+        </inkml:traceFormat>
+        <inkml:channelProperties>
+          <inkml:channelProperty channel="X" name="resolution" value="1000" units="1/cm"/>
+          <inkml:channelProperty channel="Y" name="resolution" value="1000" units="1/cm"/>
+          <inkml:channelProperty channel="F" name="resolution" value="0" units="1/dev"/>
+        </inkml:channelProperties>
+      </inkml:inkSource>
+      <inkml:timestamp xml:id="ts0" timeString="2026-06-13T06:39:24.937"/>
+    </inkml:context>
+    <inkml:brush xml:id="br0">
+      <inkml:brushProperty name="width" value="0.1" units="cm"/>
+      <inkml:brushProperty name="height" value="0.1" units="cm"/>
+      <inkml:brushProperty name="color" value="#FFC114"/>
+    </inkml:brush>
+  </inkml:definitions>
+  <inkml:trace contextRef="#ctx0" brushRef="#br0">1 62 24575,'6'0'0,"1"-2"0,-1 1 0,1-1 0,-1 0 0,0 0 0,0-1 0,12-6 0,17-6 0,-7 7 0,1 2 0,0 2 0,1 0 0,-1 2 0,0 1 0,49 5 0,-7 4 0,109 26 0,-41 13 0,-51-16 0,-61-25-105,0 0-1,0-3 0,1 0 0,0-1 1,40-4-1,-44 2-625,2 0-6095</inkml:trace>
+</inkml:ink>
+</file>
+
+<file path=ppt/ink/ink9.xml><?xml version="1.0" encoding="utf-8"?>
+<inkml:ink xmlns:inkml="http://www.w3.org/2003/InkML">
+  <inkml:definitions>
+    <inkml:context xml:id="ctx0">
+      <inkml:inkSource xml:id="inkSrc0">
+        <inkml:traceFormat>
+          <inkml:channel name="X" type="integer" min="-2.14748E9" max="2.14748E9" units="cm"/>
+          <inkml:channel name="Y" type="integer" min="-2.14748E9" max="2.14748E9" units="cm"/>
+          <inkml:channel name="F" type="integer" max="32767" units="dev"/>
+        </inkml:traceFormat>
+        <inkml:channelProperties>
+          <inkml:channelProperty channel="X" name="resolution" value="1000" units="1/cm"/>
+          <inkml:channelProperty channel="Y" name="resolution" value="1000" units="1/cm"/>
+          <inkml:channelProperty channel="F" name="resolution" value="0" units="1/dev"/>
+        </inkml:channelProperties>
+      </inkml:inkSource>
+      <inkml:timestamp xml:id="ts0" timeString="2026-06-13T06:40:03.503"/>
+    </inkml:context>
+    <inkml:brush xml:id="br0">
+      <inkml:brushProperty name="width" value="0.1" units="cm"/>
+      <inkml:brushProperty name="height" value="0.1" units="cm"/>
+      <inkml:brushProperty name="color" value="#FFC114"/>
+    </inkml:brush>
+  </inkml:definitions>
+  <inkml:trace contextRef="#ctx0" brushRef="#br0">1 488 24575,'2'1'0,"0"-1"0,0 1 0,0 0 0,0-1 0,0 1 0,0 0 0,0 0 0,0 0 0,-1 0 0,1 0 0,0 1 0,-1-1 0,1 1 0,0-1 0,-1 1 0,0-1 0,1 1 0,-1 0 0,0 0 0,0-1 0,1 4 0,21 47 0,-19-40 0,6 15 0,-7-16 0,1 0 0,0 0 0,0-1 0,1 0 0,0 0 0,1 0 0,13 16 0,-17-24 0,-1-1 0,1-1 0,0 1 0,0 0 0,0 0 0,0-1 0,0 1 0,0-1 0,0 0 0,0 1 0,0-1 0,0 0 0,-1 0 0,1 0 0,0 0 0,0-1 0,0 1 0,0 0 0,0-1 0,0 0 0,0 1 0,0-1 0,0 0 0,-1 0 0,3-1 0,48-32 0,-45 28 0,181-159 0,-10 7 0,-144 131 0,154-112 0,43-23-1365,-204 145-5461</inkml:trace>
+</inkml:ink>
 </file>
 
 <file path=ppt/notesMasters/notesMaster1.xml><?xml version="1.0" encoding="utf-8"?>
@@ -396,7 +676,7 @@
           <a:p>
             <a:fld id="{E0F4871E-3672-42BE-BBA1-0BAFEE555536}" type="datetimeFigureOut">
               <a:rPr lang="en-US" smtClean="0"/>
-              <a:t>1/8/2026</a:t>
+              <a:t>6/13/2026</a:t>
             </a:fld>
             <a:endParaRPr lang="en-US"/>
           </a:p>
@@ -894,7 +1174,7 @@
           <a:p>
             <a:fld id="{6383FAE1-13DE-4511-8C1B-C8AFB720664C}" type="datetimeFigureOut">
               <a:rPr lang="en-US" smtClean="0"/>
-              <a:t>1/8/2026</a:t>
+              <a:t>6/13/2026</a:t>
             </a:fld>
             <a:endParaRPr lang="en-US"/>
           </a:p>
@@ -1092,7 +1372,7 @@
           <a:p>
             <a:fld id="{6383FAE1-13DE-4511-8C1B-C8AFB720664C}" type="datetimeFigureOut">
               <a:rPr lang="en-US" smtClean="0"/>
-              <a:t>1/8/2026</a:t>
+              <a:t>6/13/2026</a:t>
             </a:fld>
             <a:endParaRPr lang="en-US"/>
           </a:p>
@@ -1300,7 +1580,7 @@
           <a:p>
             <a:fld id="{6383FAE1-13DE-4511-8C1B-C8AFB720664C}" type="datetimeFigureOut">
               <a:rPr lang="en-US" smtClean="0"/>
-              <a:t>1/8/2026</a:t>
+              <a:t>6/13/2026</a:t>
             </a:fld>
             <a:endParaRPr lang="en-US"/>
           </a:p>
@@ -1498,7 +1778,7 @@
           <a:p>
             <a:fld id="{6383FAE1-13DE-4511-8C1B-C8AFB720664C}" type="datetimeFigureOut">
               <a:rPr lang="en-US" smtClean="0"/>
-              <a:t>1/8/2026</a:t>
+              <a:t>6/13/2026</a:t>
             </a:fld>
             <a:endParaRPr lang="en-US"/>
           </a:p>
@@ -1773,7 +2053,7 @@
           <a:p>
             <a:fld id="{6383FAE1-13DE-4511-8C1B-C8AFB720664C}" type="datetimeFigureOut">
               <a:rPr lang="en-US" smtClean="0"/>
-              <a:t>1/8/2026</a:t>
+              <a:t>6/13/2026</a:t>
             </a:fld>
             <a:endParaRPr lang="en-US"/>
           </a:p>
@@ -2038,7 +2318,7 @@
           <a:p>
             <a:fld id="{6383FAE1-13DE-4511-8C1B-C8AFB720664C}" type="datetimeFigureOut">
               <a:rPr lang="en-US" smtClean="0"/>
-              <a:t>1/8/2026</a:t>
+              <a:t>6/13/2026</a:t>
             </a:fld>
             <a:endParaRPr lang="en-US"/>
           </a:p>
@@ -2450,7 +2730,7 @@
           <a:p>
             <a:fld id="{6383FAE1-13DE-4511-8C1B-C8AFB720664C}" type="datetimeFigureOut">
               <a:rPr lang="en-US" smtClean="0"/>
-              <a:t>1/8/2026</a:t>
+              <a:t>6/13/2026</a:t>
             </a:fld>
             <a:endParaRPr lang="en-US"/>
           </a:p>
@@ -2591,7 +2871,7 @@
           <a:p>
             <a:fld id="{6383FAE1-13DE-4511-8C1B-C8AFB720664C}" type="datetimeFigureOut">
               <a:rPr lang="en-US" smtClean="0"/>
-              <a:t>1/8/2026</a:t>
+              <a:t>6/13/2026</a:t>
             </a:fld>
             <a:endParaRPr lang="en-US"/>
           </a:p>
@@ -2704,7 +2984,7 @@
           <a:p>
             <a:fld id="{6383FAE1-13DE-4511-8C1B-C8AFB720664C}" type="datetimeFigureOut">
               <a:rPr lang="en-US" smtClean="0"/>
-              <a:t>1/8/2026</a:t>
+              <a:t>6/13/2026</a:t>
             </a:fld>
             <a:endParaRPr lang="en-US"/>
           </a:p>
@@ -3015,7 +3295,7 @@
           <a:p>
             <a:fld id="{6383FAE1-13DE-4511-8C1B-C8AFB720664C}" type="datetimeFigureOut">
               <a:rPr lang="en-US" smtClean="0"/>
-              <a:t>1/8/2026</a:t>
+              <a:t>6/13/2026</a:t>
             </a:fld>
             <a:endParaRPr lang="en-US"/>
           </a:p>
@@ -3306,7 +3586,7 @@
           <a:p>
             <a:fld id="{6383FAE1-13DE-4511-8C1B-C8AFB720664C}" type="datetimeFigureOut">
               <a:rPr lang="en-US" smtClean="0"/>
-              <a:t>1/8/2026</a:t>
+              <a:t>6/13/2026</a:t>
             </a:fld>
             <a:endParaRPr lang="en-US"/>
           </a:p>
@@ -3550,7 +3830,7 @@
           <a:p>
             <a:fld id="{6383FAE1-13DE-4511-8C1B-C8AFB720664C}" type="datetimeFigureOut">
               <a:rPr lang="en-US" smtClean="0"/>
-              <a:t>1/8/2026</a:t>
+              <a:t>6/13/2026</a:t>
             </a:fld>
             <a:endParaRPr lang="en-US"/>
           </a:p>
@@ -4434,6 +4714,108 @@
           </a:prstGeom>
         </p:spPr>
       </p:pic>
+      <mc:AlternateContent xmlns:mc="http://schemas.openxmlformats.org/markup-compatibility/2006" xmlns:p14="http://schemas.microsoft.com/office/powerpoint/2010/main">
+        <mc:Choice Requires="p14">
+          <p:contentPart p14:bwMode="auto" r:id="rId4">
+            <p14:nvContentPartPr>
+              <p14:cNvPr id="3" name="Ink 2">
+                <a:extLst>
+                  <a:ext uri="{FF2B5EF4-FFF2-40B4-BE49-F238E27FC236}">
+                    <a16:creationId xmlns:a16="http://schemas.microsoft.com/office/drawing/2014/main" id="{FBC3101E-D8BA-4AAC-F191-C6B484CCBAA2}"/>
+                  </a:ext>
+                </a:extLst>
+              </p14:cNvPr>
+              <p14:cNvContentPartPr/>
+              <p14:nvPr/>
+            </p14:nvContentPartPr>
+            <p14:xfrm>
+              <a:off x="5772555" y="3199335"/>
+              <a:ext cx="774000" cy="231120"/>
+            </p14:xfrm>
+          </p:contentPart>
+        </mc:Choice>
+        <mc:Fallback xmlns="">
+          <p:pic>
+            <p:nvPicPr>
+              <p:cNvPr id="3" name="Ink 2">
+                <a:extLst>
+                  <a:ext uri="{FF2B5EF4-FFF2-40B4-BE49-F238E27FC236}">
+                    <a16:creationId xmlns:a16="http://schemas.microsoft.com/office/drawing/2014/main" id="{FBC3101E-D8BA-4AAC-F191-C6B484CCBAA2}"/>
+                  </a:ext>
+                </a:extLst>
+              </p:cNvPr>
+              <p:cNvPicPr/>
+              <p:nvPr/>
+            </p:nvPicPr>
+            <p:blipFill>
+              <a:blip r:embed="rId5"/>
+              <a:stretch>
+                <a:fillRect/>
+              </a:stretch>
+            </p:blipFill>
+            <p:spPr>
+              <a:xfrm>
+                <a:off x="5754555" y="3181335"/>
+                <a:ext cx="809640" cy="266760"/>
+              </a:xfrm>
+              <a:prstGeom prst="rect">
+                <a:avLst/>
+              </a:prstGeom>
+            </p:spPr>
+          </p:pic>
+        </mc:Fallback>
+      </mc:AlternateContent>
+      <mc:AlternateContent xmlns:mc="http://schemas.openxmlformats.org/markup-compatibility/2006" xmlns:p14="http://schemas.microsoft.com/office/powerpoint/2010/main">
+        <mc:Choice Requires="p14">
+          <p:contentPart p14:bwMode="auto" r:id="rId6">
+            <p14:nvContentPartPr>
+              <p14:cNvPr id="7" name="Ink 6">
+                <a:extLst>
+                  <a:ext uri="{FF2B5EF4-FFF2-40B4-BE49-F238E27FC236}">
+                    <a16:creationId xmlns:a16="http://schemas.microsoft.com/office/drawing/2014/main" id="{83D12D05-5824-B74F-A1C2-A8A669ED1B68}"/>
+                  </a:ext>
+                </a:extLst>
+              </p14:cNvPr>
+              <p14:cNvContentPartPr/>
+              <p14:nvPr/>
+            </p14:nvContentPartPr>
+            <p14:xfrm>
+              <a:off x="5752395" y="3181335"/>
+              <a:ext cx="724680" cy="194760"/>
+            </p14:xfrm>
+          </p:contentPart>
+        </mc:Choice>
+        <mc:Fallback xmlns="">
+          <p:pic>
+            <p:nvPicPr>
+              <p:cNvPr id="7" name="Ink 6">
+                <a:extLst>
+                  <a:ext uri="{FF2B5EF4-FFF2-40B4-BE49-F238E27FC236}">
+                    <a16:creationId xmlns:a16="http://schemas.microsoft.com/office/drawing/2014/main" id="{83D12D05-5824-B74F-A1C2-A8A669ED1B68}"/>
+                  </a:ext>
+                </a:extLst>
+              </p:cNvPr>
+              <p:cNvPicPr/>
+              <p:nvPr/>
+            </p:nvPicPr>
+            <p:blipFill>
+              <a:blip r:embed="rId7"/>
+              <a:stretch>
+                <a:fillRect/>
+              </a:stretch>
+            </p:blipFill>
+            <p:spPr>
+              <a:xfrm>
+                <a:off x="5734755" y="3163335"/>
+                <a:ext cx="760320" cy="230400"/>
+              </a:xfrm>
+              <a:prstGeom prst="rect">
+                <a:avLst/>
+              </a:prstGeom>
+            </p:spPr>
+          </p:pic>
+        </mc:Fallback>
+      </mc:AlternateContent>
     </p:spTree>
     <p:extLst>
       <p:ext uri="{BB962C8B-B14F-4D97-AF65-F5344CB8AC3E}">
@@ -4795,6 +5177,312 @@
           </a:p>
         </p:txBody>
       </p:sp>
+      <mc:AlternateContent xmlns:mc="http://schemas.openxmlformats.org/markup-compatibility/2006">
+        <mc:Choice xmlns:p14="http://schemas.microsoft.com/office/powerpoint/2010/main" Requires="p14">
+          <p:contentPart p14:bwMode="auto" r:id="rId4">
+            <p14:nvContentPartPr>
+              <p14:cNvPr id="3" name="Ink 2">
+                <a:extLst>
+                  <a:ext uri="{FF2B5EF4-FFF2-40B4-BE49-F238E27FC236}">
+                    <a16:creationId xmlns:a16="http://schemas.microsoft.com/office/drawing/2014/main" id="{3C68550F-0A7B-80A0-04C0-344DC1A9BB37}"/>
+                  </a:ext>
+                </a:extLst>
+              </p14:cNvPr>
+              <p14:cNvContentPartPr/>
+              <p14:nvPr/>
+            </p14:nvContentPartPr>
+            <p14:xfrm>
+              <a:off x="10324755" y="3517020"/>
+              <a:ext cx="480960" cy="387360"/>
+            </p14:xfrm>
+          </p:contentPart>
+        </mc:Choice>
+        <mc:Fallback>
+          <p:pic>
+            <p:nvPicPr>
+              <p:cNvPr id="3" name="Ink 2">
+                <a:extLst>
+                  <a:ext uri="{FF2B5EF4-FFF2-40B4-BE49-F238E27FC236}">
+                    <a16:creationId xmlns:a16="http://schemas.microsoft.com/office/drawing/2014/main" id="{3C68550F-0A7B-80A0-04C0-344DC1A9BB37}"/>
+                  </a:ext>
+                </a:extLst>
+              </p:cNvPr>
+              <p:cNvPicPr/>
+              <p:nvPr/>
+            </p:nvPicPr>
+            <p:blipFill>
+              <a:blip r:embed="rId5"/>
+              <a:stretch>
+                <a:fillRect/>
+              </a:stretch>
+            </p:blipFill>
+            <p:spPr>
+              <a:xfrm>
+                <a:off x="10307115" y="3499020"/>
+                <a:ext cx="516600" cy="423000"/>
+              </a:xfrm>
+              <a:prstGeom prst="rect">
+                <a:avLst/>
+              </a:prstGeom>
+            </p:spPr>
+          </p:pic>
+        </mc:Fallback>
+      </mc:AlternateContent>
+      <mc:AlternateContent xmlns:mc="http://schemas.openxmlformats.org/markup-compatibility/2006">
+        <mc:Choice xmlns:p14="http://schemas.microsoft.com/office/powerpoint/2010/main" Requires="p14">
+          <p:contentPart p14:bwMode="auto" r:id="rId6">
+            <p14:nvContentPartPr>
+              <p14:cNvPr id="4" name="Ink 3">
+                <a:extLst>
+                  <a:ext uri="{FF2B5EF4-FFF2-40B4-BE49-F238E27FC236}">
+                    <a16:creationId xmlns:a16="http://schemas.microsoft.com/office/drawing/2014/main" id="{FBB16C68-8DFE-8D98-C008-9C9667869A5F}"/>
+                  </a:ext>
+                </a:extLst>
+              </p14:cNvPr>
+              <p14:cNvContentPartPr/>
+              <p14:nvPr/>
+            </p14:nvContentPartPr>
+            <p14:xfrm>
+              <a:off x="6311115" y="3037860"/>
+              <a:ext cx="633240" cy="1124640"/>
+            </p14:xfrm>
+          </p:contentPart>
+        </mc:Choice>
+        <mc:Fallback>
+          <p:pic>
+            <p:nvPicPr>
+              <p:cNvPr id="4" name="Ink 3">
+                <a:extLst>
+                  <a:ext uri="{FF2B5EF4-FFF2-40B4-BE49-F238E27FC236}">
+                    <a16:creationId xmlns:a16="http://schemas.microsoft.com/office/drawing/2014/main" id="{FBB16C68-8DFE-8D98-C008-9C9667869A5F}"/>
+                  </a:ext>
+                </a:extLst>
+              </p:cNvPr>
+              <p:cNvPicPr/>
+              <p:nvPr/>
+            </p:nvPicPr>
+            <p:blipFill>
+              <a:blip r:embed="rId7"/>
+              <a:stretch>
+                <a:fillRect/>
+              </a:stretch>
+            </p:blipFill>
+            <p:spPr>
+              <a:xfrm>
+                <a:off x="6293115" y="3020220"/>
+                <a:ext cx="668880" cy="1160280"/>
+              </a:xfrm>
+              <a:prstGeom prst="rect">
+                <a:avLst/>
+              </a:prstGeom>
+            </p:spPr>
+          </p:pic>
+        </mc:Fallback>
+      </mc:AlternateContent>
+      <mc:AlternateContent xmlns:mc="http://schemas.openxmlformats.org/markup-compatibility/2006">
+        <mc:Choice xmlns:p14="http://schemas.microsoft.com/office/powerpoint/2010/main" Requires="p14">
+          <p:contentPart p14:bwMode="auto" r:id="rId8">
+            <p14:nvContentPartPr>
+              <p14:cNvPr id="6" name="Ink 5">
+                <a:extLst>
+                  <a:ext uri="{FF2B5EF4-FFF2-40B4-BE49-F238E27FC236}">
+                    <a16:creationId xmlns:a16="http://schemas.microsoft.com/office/drawing/2014/main" id="{EB63F5BF-8ED5-C8A1-C919-7EE142441C97}"/>
+                  </a:ext>
+                </a:extLst>
+              </p14:cNvPr>
+              <p14:cNvContentPartPr/>
+              <p14:nvPr/>
+            </p14:nvContentPartPr>
+            <p14:xfrm>
+              <a:off x="8600715" y="5804820"/>
+              <a:ext cx="208800" cy="113400"/>
+            </p14:xfrm>
+          </p:contentPart>
+        </mc:Choice>
+        <mc:Fallback>
+          <p:pic>
+            <p:nvPicPr>
+              <p:cNvPr id="6" name="Ink 5">
+                <a:extLst>
+                  <a:ext uri="{FF2B5EF4-FFF2-40B4-BE49-F238E27FC236}">
+                    <a16:creationId xmlns:a16="http://schemas.microsoft.com/office/drawing/2014/main" id="{EB63F5BF-8ED5-C8A1-C919-7EE142441C97}"/>
+                  </a:ext>
+                </a:extLst>
+              </p:cNvPr>
+              <p:cNvPicPr/>
+              <p:nvPr/>
+            </p:nvPicPr>
+            <p:blipFill>
+              <a:blip r:embed="rId9"/>
+              <a:stretch>
+                <a:fillRect/>
+              </a:stretch>
+            </p:blipFill>
+            <p:spPr>
+              <a:xfrm>
+                <a:off x="8583075" y="5786820"/>
+                <a:ext cx="244440" cy="149040"/>
+              </a:xfrm>
+              <a:prstGeom prst="rect">
+                <a:avLst/>
+              </a:prstGeom>
+            </p:spPr>
+          </p:pic>
+        </mc:Fallback>
+      </mc:AlternateContent>
+      <mc:AlternateContent xmlns:mc="http://schemas.openxmlformats.org/markup-compatibility/2006">
+        <mc:Choice xmlns:p14="http://schemas.microsoft.com/office/powerpoint/2010/main" Requires="p14">
+          <p:contentPart p14:bwMode="auto" r:id="rId10">
+            <p14:nvContentPartPr>
+              <p14:cNvPr id="7" name="Ink 6">
+                <a:extLst>
+                  <a:ext uri="{FF2B5EF4-FFF2-40B4-BE49-F238E27FC236}">
+                    <a16:creationId xmlns:a16="http://schemas.microsoft.com/office/drawing/2014/main" id="{F786B4BA-503E-AE10-FC59-0338A7E28876}"/>
+                  </a:ext>
+                </a:extLst>
+              </p14:cNvPr>
+              <p14:cNvContentPartPr/>
+              <p14:nvPr/>
+            </p14:nvContentPartPr>
+            <p14:xfrm>
+              <a:off x="9791595" y="5476860"/>
+              <a:ext cx="336600" cy="161640"/>
+            </p14:xfrm>
+          </p:contentPart>
+        </mc:Choice>
+        <mc:Fallback>
+          <p:pic>
+            <p:nvPicPr>
+              <p:cNvPr id="7" name="Ink 6">
+                <a:extLst>
+                  <a:ext uri="{FF2B5EF4-FFF2-40B4-BE49-F238E27FC236}">
+                    <a16:creationId xmlns:a16="http://schemas.microsoft.com/office/drawing/2014/main" id="{F786B4BA-503E-AE10-FC59-0338A7E28876}"/>
+                  </a:ext>
+                </a:extLst>
+              </p:cNvPr>
+              <p:cNvPicPr/>
+              <p:nvPr/>
+            </p:nvPicPr>
+            <p:blipFill>
+              <a:blip r:embed="rId11"/>
+              <a:stretch>
+                <a:fillRect/>
+              </a:stretch>
+            </p:blipFill>
+            <p:spPr>
+              <a:xfrm>
+                <a:off x="9773955" y="5458860"/>
+                <a:ext cx="372240" cy="197280"/>
+              </a:xfrm>
+              <a:prstGeom prst="rect">
+                <a:avLst/>
+              </a:prstGeom>
+            </p:spPr>
+          </p:pic>
+        </mc:Fallback>
+      </mc:AlternateContent>
+      <mc:AlternateContent xmlns:mc="http://schemas.openxmlformats.org/markup-compatibility/2006">
+        <mc:Choice xmlns:p14="http://schemas.microsoft.com/office/powerpoint/2010/main" Requires="p14">
+          <p:contentPart p14:bwMode="auto" r:id="rId12">
+            <p14:nvContentPartPr>
+              <p14:cNvPr id="10" name="Ink 9">
+                <a:extLst>
+                  <a:ext uri="{FF2B5EF4-FFF2-40B4-BE49-F238E27FC236}">
+                    <a16:creationId xmlns:a16="http://schemas.microsoft.com/office/drawing/2014/main" id="{DE5D5F8C-B0C9-FBB6-5588-F0B42A0D75DE}"/>
+                  </a:ext>
+                </a:extLst>
+              </p14:cNvPr>
+              <p14:cNvContentPartPr/>
+              <p14:nvPr/>
+            </p14:nvContentPartPr>
+            <p14:xfrm>
+              <a:off x="93555" y="4656780"/>
+              <a:ext cx="306720" cy="1536120"/>
+            </p14:xfrm>
+          </p:contentPart>
+        </mc:Choice>
+        <mc:Fallback>
+          <p:pic>
+            <p:nvPicPr>
+              <p:cNvPr id="10" name="Ink 9">
+                <a:extLst>
+                  <a:ext uri="{FF2B5EF4-FFF2-40B4-BE49-F238E27FC236}">
+                    <a16:creationId xmlns:a16="http://schemas.microsoft.com/office/drawing/2014/main" id="{DE5D5F8C-B0C9-FBB6-5588-F0B42A0D75DE}"/>
+                  </a:ext>
+                </a:extLst>
+              </p:cNvPr>
+              <p:cNvPicPr/>
+              <p:nvPr/>
+            </p:nvPicPr>
+            <p:blipFill>
+              <a:blip r:embed="rId13"/>
+              <a:stretch>
+                <a:fillRect/>
+              </a:stretch>
+            </p:blipFill>
+            <p:spPr>
+              <a:xfrm>
+                <a:off x="75915" y="4638780"/>
+                <a:ext cx="342360" cy="1571760"/>
+              </a:xfrm>
+              <a:prstGeom prst="rect">
+                <a:avLst/>
+              </a:prstGeom>
+            </p:spPr>
+          </p:pic>
+        </mc:Fallback>
+      </mc:AlternateContent>
+      <mc:AlternateContent xmlns:mc="http://schemas.openxmlformats.org/markup-compatibility/2006">
+        <mc:Choice xmlns:p14="http://schemas.microsoft.com/office/powerpoint/2010/main" Requires="p14">
+          <p:contentPart p14:bwMode="auto" r:id="rId14">
+            <p14:nvContentPartPr>
+              <p14:cNvPr id="11" name="Ink 10">
+                <a:extLst>
+                  <a:ext uri="{FF2B5EF4-FFF2-40B4-BE49-F238E27FC236}">
+                    <a16:creationId xmlns:a16="http://schemas.microsoft.com/office/drawing/2014/main" id="{45D02257-0A9C-5492-FCD5-6C8161B52EEF}"/>
+                  </a:ext>
+                </a:extLst>
+              </p14:cNvPr>
+              <p14:cNvContentPartPr/>
+              <p14:nvPr/>
+            </p14:nvContentPartPr>
+            <p14:xfrm>
+              <a:off x="1552275" y="6035580"/>
+              <a:ext cx="389880" cy="52200"/>
+            </p14:xfrm>
+          </p:contentPart>
+        </mc:Choice>
+        <mc:Fallback>
+          <p:pic>
+            <p:nvPicPr>
+              <p:cNvPr id="11" name="Ink 10">
+                <a:extLst>
+                  <a:ext uri="{FF2B5EF4-FFF2-40B4-BE49-F238E27FC236}">
+                    <a16:creationId xmlns:a16="http://schemas.microsoft.com/office/drawing/2014/main" id="{45D02257-0A9C-5492-FCD5-6C8161B52EEF}"/>
+                  </a:ext>
+                </a:extLst>
+              </p:cNvPr>
+              <p:cNvPicPr/>
+              <p:nvPr/>
+            </p:nvPicPr>
+            <p:blipFill>
+              <a:blip r:embed="rId15"/>
+              <a:stretch>
+                <a:fillRect/>
+              </a:stretch>
+            </p:blipFill>
+            <p:spPr>
+              <a:xfrm>
+                <a:off x="1534635" y="6017940"/>
+                <a:ext cx="425520" cy="87840"/>
+              </a:xfrm>
+              <a:prstGeom prst="rect">
+                <a:avLst/>
+              </a:prstGeom>
+            </p:spPr>
+          </p:pic>
+        </mc:Fallback>
+      </mc:AlternateContent>
     </p:spTree>
     <p:extLst>
       <p:ext uri="{BB962C8B-B14F-4D97-AF65-F5344CB8AC3E}">
@@ -5030,7 +5718,7 @@
         </p:nvSpPr>
         <p:spPr>
           <a:xfrm>
-            <a:off x="838200" y="266806"/>
+            <a:off x="504825" y="157331"/>
             <a:ext cx="4559710" cy="637762"/>
           </a:xfrm>
         </p:spPr>
@@ -5070,8 +5758,8 @@
         </p:blipFill>
         <p:spPr>
           <a:xfrm>
-            <a:off x="1105327" y="2883970"/>
-            <a:ext cx="10349226" cy="3814827"/>
+            <a:off x="333186" y="2415437"/>
+            <a:ext cx="11273767" cy="4155622"/>
           </a:xfrm>
           <a:prstGeom prst="rect">
             <a:avLst/>
@@ -5092,7 +5780,7 @@
         </p:nvSpPr>
         <p:spPr>
           <a:xfrm>
-            <a:off x="323849" y="895261"/>
+            <a:off x="723899" y="795093"/>
             <a:ext cx="8315325" cy="1569660"/>
           </a:xfrm>
           <a:prstGeom prst="rect">
@@ -5176,6 +5864,108 @@
           </a:p>
         </p:txBody>
       </p:sp>
+      <mc:AlternateContent xmlns:mc="http://schemas.openxmlformats.org/markup-compatibility/2006">
+        <mc:Choice xmlns:p14="http://schemas.microsoft.com/office/powerpoint/2010/main" Requires="p14">
+          <p:contentPart p14:bwMode="auto" r:id="rId3">
+            <p14:nvContentPartPr>
+              <p14:cNvPr id="3" name="Ink 2">
+                <a:extLst>
+                  <a:ext uri="{FF2B5EF4-FFF2-40B4-BE49-F238E27FC236}">
+                    <a16:creationId xmlns:a16="http://schemas.microsoft.com/office/drawing/2014/main" id="{7AD67AAD-8F42-7E5C-C374-6A67B427297B}"/>
+                  </a:ext>
+                </a:extLst>
+              </p14:cNvPr>
+              <p14:cNvContentPartPr/>
+              <p14:nvPr/>
+            </p14:nvContentPartPr>
+            <p14:xfrm>
+              <a:off x="4009635" y="3576975"/>
+              <a:ext cx="389160" cy="257760"/>
+            </p14:xfrm>
+          </p:contentPart>
+        </mc:Choice>
+        <mc:Fallback>
+          <p:pic>
+            <p:nvPicPr>
+              <p:cNvPr id="3" name="Ink 2">
+                <a:extLst>
+                  <a:ext uri="{FF2B5EF4-FFF2-40B4-BE49-F238E27FC236}">
+                    <a16:creationId xmlns:a16="http://schemas.microsoft.com/office/drawing/2014/main" id="{7AD67AAD-8F42-7E5C-C374-6A67B427297B}"/>
+                  </a:ext>
+                </a:extLst>
+              </p:cNvPr>
+              <p:cNvPicPr/>
+              <p:nvPr/>
+            </p:nvPicPr>
+            <p:blipFill>
+              <a:blip r:embed="rId4"/>
+              <a:stretch>
+                <a:fillRect/>
+              </a:stretch>
+            </p:blipFill>
+            <p:spPr>
+              <a:xfrm>
+                <a:off x="3991995" y="3558975"/>
+                <a:ext cx="424800" cy="293400"/>
+              </a:xfrm>
+              <a:prstGeom prst="rect">
+                <a:avLst/>
+              </a:prstGeom>
+            </p:spPr>
+          </p:pic>
+        </mc:Fallback>
+      </mc:AlternateContent>
+      <mc:AlternateContent xmlns:mc="http://schemas.openxmlformats.org/markup-compatibility/2006">
+        <mc:Choice xmlns:p14="http://schemas.microsoft.com/office/powerpoint/2010/main" Requires="p14">
+          <p:contentPart p14:bwMode="auto" r:id="rId5">
+            <p14:nvContentPartPr>
+              <p14:cNvPr id="4" name="Ink 3">
+                <a:extLst>
+                  <a:ext uri="{FF2B5EF4-FFF2-40B4-BE49-F238E27FC236}">
+                    <a16:creationId xmlns:a16="http://schemas.microsoft.com/office/drawing/2014/main" id="{C2D632CA-0FB0-9E65-823E-B54248226E3E}"/>
+                  </a:ext>
+                </a:extLst>
+              </p14:cNvPr>
+              <p14:cNvContentPartPr/>
+              <p14:nvPr/>
+            </p14:nvContentPartPr>
+            <p14:xfrm>
+              <a:off x="3152475" y="1893255"/>
+              <a:ext cx="633240" cy="293040"/>
+            </p14:xfrm>
+          </p:contentPart>
+        </mc:Choice>
+        <mc:Fallback>
+          <p:pic>
+            <p:nvPicPr>
+              <p:cNvPr id="4" name="Ink 3">
+                <a:extLst>
+                  <a:ext uri="{FF2B5EF4-FFF2-40B4-BE49-F238E27FC236}">
+                    <a16:creationId xmlns:a16="http://schemas.microsoft.com/office/drawing/2014/main" id="{C2D632CA-0FB0-9E65-823E-B54248226E3E}"/>
+                  </a:ext>
+                </a:extLst>
+              </p:cNvPr>
+              <p:cNvPicPr/>
+              <p:nvPr/>
+            </p:nvPicPr>
+            <p:blipFill>
+              <a:blip r:embed="rId6"/>
+              <a:stretch>
+                <a:fillRect/>
+              </a:stretch>
+            </p:blipFill>
+            <p:spPr>
+              <a:xfrm>
+                <a:off x="3134835" y="1875255"/>
+                <a:ext cx="668880" cy="328680"/>
+              </a:xfrm>
+              <a:prstGeom prst="rect">
+                <a:avLst/>
+              </a:prstGeom>
+            </p:spPr>
+          </p:pic>
+        </mc:Fallback>
+      </mc:AlternateContent>
     </p:spTree>
     <p:extLst>
       <p:ext uri="{BB962C8B-B14F-4D97-AF65-F5344CB8AC3E}">
